--- a/examples/pm2_simple_numbering/simple_numbering_merged.pptx
+++ b/examples/pm2_simple_numbering/simple_numbering_merged.pptx
@@ -771,7 +771,7 @@
     </p:spTree>
     <p:extLst>
       <p:ext uri="{BB962C8B-B14F-4D97-AF65-F5344CB8AC3E}">
-        <p14:creationId xmlns:p14="http://schemas.microsoft.com/office/powerpoint/2010/main" val="2274755630"/>
+        <p14:creationId xmlns:p14="http://schemas.microsoft.com/office/powerpoint/2010/main" val="930499488"/>
       </p:ext>
     </p:extLst>
   </p:cSld>
@@ -1030,7 +1030,7 @@
     </p:spTree>
     <p:extLst>
       <p:ext uri="{BB962C8B-B14F-4D97-AF65-F5344CB8AC3E}">
-        <p14:creationId xmlns:p14="http://schemas.microsoft.com/office/powerpoint/2010/main" val="204138493"/>
+        <p14:creationId xmlns:p14="http://schemas.microsoft.com/office/powerpoint/2010/main" val="535976471"/>
       </p:ext>
     </p:extLst>
   </p:cSld>
@@ -1245,7 +1245,7 @@
     </p:spTree>
     <p:extLst>
       <p:ext uri="{BB962C8B-B14F-4D97-AF65-F5344CB8AC3E}">
-        <p14:creationId xmlns:p14="http://schemas.microsoft.com/office/powerpoint/2010/main" val="4228455661"/>
+        <p14:creationId xmlns:p14="http://schemas.microsoft.com/office/powerpoint/2010/main" val="260711849"/>
       </p:ext>
     </p:extLst>
   </p:cSld>
@@ -1482,7 +1482,7 @@
     </p:spTree>
     <p:extLst>
       <p:ext uri="{BB962C8B-B14F-4D97-AF65-F5344CB8AC3E}">
-        <p14:creationId xmlns:p14="http://schemas.microsoft.com/office/powerpoint/2010/main" val="3801137083"/>
+        <p14:creationId xmlns:p14="http://schemas.microsoft.com/office/powerpoint/2010/main" val="3169373842"/>
       </p:ext>
     </p:extLst>
   </p:cSld>
@@ -1710,7 +1710,7 @@
     </p:spTree>
     <p:extLst>
       <p:ext uri="{BB962C8B-B14F-4D97-AF65-F5344CB8AC3E}">
-        <p14:creationId xmlns:p14="http://schemas.microsoft.com/office/powerpoint/2010/main" val="3448564182"/>
+        <p14:creationId xmlns:p14="http://schemas.microsoft.com/office/powerpoint/2010/main" val="3476339853"/>
       </p:ext>
     </p:extLst>
   </p:cSld>
@@ -1818,7 +1818,7 @@
     </p:spTree>
     <p:extLst>
       <p:ext uri="{BB962C8B-B14F-4D97-AF65-F5344CB8AC3E}">
-        <p14:creationId xmlns:p14="http://schemas.microsoft.com/office/powerpoint/2010/main" val="3374292938"/>
+        <p14:creationId xmlns:p14="http://schemas.microsoft.com/office/powerpoint/2010/main" val="259172454"/>
       </p:ext>
     </p:extLst>
   </p:cSld>
@@ -1926,7 +1926,7 @@
     </p:spTree>
     <p:extLst>
       <p:ext uri="{BB962C8B-B14F-4D97-AF65-F5344CB8AC3E}">
-        <p14:creationId xmlns:p14="http://schemas.microsoft.com/office/powerpoint/2010/main" val="3485155984"/>
+        <p14:creationId xmlns:p14="http://schemas.microsoft.com/office/powerpoint/2010/main" val="3657468491"/>
       </p:ext>
     </p:extLst>
   </p:cSld>
@@ -2034,7 +2034,7 @@
     </p:spTree>
     <p:extLst>
       <p:ext uri="{BB962C8B-B14F-4D97-AF65-F5344CB8AC3E}">
-        <p14:creationId xmlns:p14="http://schemas.microsoft.com/office/powerpoint/2010/main" val="1570419902"/>
+        <p14:creationId xmlns:p14="http://schemas.microsoft.com/office/powerpoint/2010/main" val="3199436507"/>
       </p:ext>
     </p:extLst>
   </p:cSld>
@@ -6455,7 +6455,7 @@
     </p:spTree>
     <p:extLst>
       <p:ext uri="{BB962C8B-B14F-4D97-AF65-F5344CB8AC3E}">
-        <p14:creationId xmlns:p14="http://schemas.microsoft.com/office/powerpoint/2010/main" val="3614116025"/>
+        <p14:creationId xmlns:p14="http://schemas.microsoft.com/office/powerpoint/2010/main" val="1426530229"/>
       </p:ext>
     </p:extLst>
   </p:cSld>
@@ -7098,7 +7098,7 @@
     </p:spTree>
     <p:extLst>
       <p:ext uri="{BB962C8B-B14F-4D97-AF65-F5344CB8AC3E}">
-        <p14:creationId xmlns:p14="http://schemas.microsoft.com/office/powerpoint/2010/main" val="1319713687"/>
+        <p14:creationId xmlns:p14="http://schemas.microsoft.com/office/powerpoint/2010/main" val="3000251586"/>
       </p:ext>
     </p:extLst>
   </p:cSld>
@@ -7708,7 +7708,7 @@
     </p:spTree>
     <p:extLst>
       <p:ext uri="{BB962C8B-B14F-4D97-AF65-F5344CB8AC3E}">
-        <p14:creationId xmlns:p14="http://schemas.microsoft.com/office/powerpoint/2010/main" val="3503227623"/>
+        <p14:creationId xmlns:p14="http://schemas.microsoft.com/office/powerpoint/2010/main" val="745220150"/>
       </p:ext>
     </p:extLst>
   </p:cSld>
@@ -8794,7 +8794,7 @@
     </p:spTree>
     <p:extLst>
       <p:ext uri="{BB962C8B-B14F-4D97-AF65-F5344CB8AC3E}">
-        <p14:creationId xmlns:p14="http://schemas.microsoft.com/office/powerpoint/2010/main" val="729074088"/>
+        <p14:creationId xmlns:p14="http://schemas.microsoft.com/office/powerpoint/2010/main" val="1874168928"/>
       </p:ext>
     </p:extLst>
   </p:cSld>
@@ -14054,7 +14054,7 @@
     </p:spTree>
     <p:extLst>
       <p:ext uri="{BB962C8B-B14F-4D97-AF65-F5344CB8AC3E}">
-        <p14:creationId xmlns:p14="http://schemas.microsoft.com/office/powerpoint/2010/main" val="850984695"/>
+        <p14:creationId xmlns:p14="http://schemas.microsoft.com/office/powerpoint/2010/main" val="3323208633"/>
       </p:ext>
     </p:extLst>
   </p:cSld>
@@ -14323,7 +14323,7 @@
     </p:spTree>
     <p:extLst>
       <p:ext uri="{BB962C8B-B14F-4D97-AF65-F5344CB8AC3E}">
-        <p14:creationId xmlns:p14="http://schemas.microsoft.com/office/powerpoint/2010/main" val="4043219683"/>
+        <p14:creationId xmlns:p14="http://schemas.microsoft.com/office/powerpoint/2010/main" val="1637269872"/>
       </p:ext>
     </p:extLst>
   </p:cSld>
@@ -14678,7 +14678,7 @@
     </p:spTree>
     <p:extLst>
       <p:ext uri="{BB962C8B-B14F-4D97-AF65-F5344CB8AC3E}">
-        <p14:creationId xmlns:p14="http://schemas.microsoft.com/office/powerpoint/2010/main" val="3147908107"/>
+        <p14:creationId xmlns:p14="http://schemas.microsoft.com/office/powerpoint/2010/main" val="912293259"/>
       </p:ext>
     </p:extLst>
   </p:cSld>
@@ -15033,7 +15033,7 @@
     </p:spTree>
     <p:extLst>
       <p:ext uri="{BB962C8B-B14F-4D97-AF65-F5344CB8AC3E}">
-        <p14:creationId xmlns:p14="http://schemas.microsoft.com/office/powerpoint/2010/main" val="3234983533"/>
+        <p14:creationId xmlns:p14="http://schemas.microsoft.com/office/powerpoint/2010/main" val="2224551019"/>
       </p:ext>
     </p:extLst>
   </p:cSld>

--- a/examples/pm2_simple_numbering/simple_numbering_merged.pptx
+++ b/examples/pm2_simple_numbering/simple_numbering_merged.pptx
@@ -245,7 +245,7 @@
           <a:p>
             <a:fld id="{294670BC-B8C6-44A7-84E1-23632D8FD86F}" type="datetimeFigureOut">
               <a:rPr kumimoji="1" lang="ja-JP" altLang="en-US" smtClean="0"/>
-              <a:t>2026/6/4</a:t>
+              <a:t>2026/6/6</a:t>
             </a:fld>
             <a:endParaRPr kumimoji="1" lang="ja-JP" altLang="en-US"/>
           </a:p>
@@ -771,7 +771,7 @@
     </p:spTree>
     <p:extLst>
       <p:ext uri="{BB962C8B-B14F-4D97-AF65-F5344CB8AC3E}">
-        <p14:creationId xmlns:p14="http://schemas.microsoft.com/office/powerpoint/2010/main" val="930499488"/>
+        <p14:creationId xmlns:p14="http://schemas.microsoft.com/office/powerpoint/2010/main" val="1386515695"/>
       </p:ext>
     </p:extLst>
   </p:cSld>
@@ -1030,7 +1030,7 @@
     </p:spTree>
     <p:extLst>
       <p:ext uri="{BB962C8B-B14F-4D97-AF65-F5344CB8AC3E}">
-        <p14:creationId xmlns:p14="http://schemas.microsoft.com/office/powerpoint/2010/main" val="535976471"/>
+        <p14:creationId xmlns:p14="http://schemas.microsoft.com/office/powerpoint/2010/main" val="620749759"/>
       </p:ext>
     </p:extLst>
   </p:cSld>
@@ -1245,7 +1245,7 @@
     </p:spTree>
     <p:extLst>
       <p:ext uri="{BB962C8B-B14F-4D97-AF65-F5344CB8AC3E}">
-        <p14:creationId xmlns:p14="http://schemas.microsoft.com/office/powerpoint/2010/main" val="260711849"/>
+        <p14:creationId xmlns:p14="http://schemas.microsoft.com/office/powerpoint/2010/main" val="2892907192"/>
       </p:ext>
     </p:extLst>
   </p:cSld>
@@ -1482,7 +1482,7 @@
     </p:spTree>
     <p:extLst>
       <p:ext uri="{BB962C8B-B14F-4D97-AF65-F5344CB8AC3E}">
-        <p14:creationId xmlns:p14="http://schemas.microsoft.com/office/powerpoint/2010/main" val="3169373842"/>
+        <p14:creationId xmlns:p14="http://schemas.microsoft.com/office/powerpoint/2010/main" val="137618024"/>
       </p:ext>
     </p:extLst>
   </p:cSld>
@@ -1710,7 +1710,7 @@
     </p:spTree>
     <p:extLst>
       <p:ext uri="{BB962C8B-B14F-4D97-AF65-F5344CB8AC3E}">
-        <p14:creationId xmlns:p14="http://schemas.microsoft.com/office/powerpoint/2010/main" val="3476339853"/>
+        <p14:creationId xmlns:p14="http://schemas.microsoft.com/office/powerpoint/2010/main" val="2137841715"/>
       </p:ext>
     </p:extLst>
   </p:cSld>
@@ -1818,7 +1818,7 @@
     </p:spTree>
     <p:extLst>
       <p:ext uri="{BB962C8B-B14F-4D97-AF65-F5344CB8AC3E}">
-        <p14:creationId xmlns:p14="http://schemas.microsoft.com/office/powerpoint/2010/main" val="259172454"/>
+        <p14:creationId xmlns:p14="http://schemas.microsoft.com/office/powerpoint/2010/main" val="593729104"/>
       </p:ext>
     </p:extLst>
   </p:cSld>
@@ -1926,7 +1926,7 @@
     </p:spTree>
     <p:extLst>
       <p:ext uri="{BB962C8B-B14F-4D97-AF65-F5344CB8AC3E}">
-        <p14:creationId xmlns:p14="http://schemas.microsoft.com/office/powerpoint/2010/main" val="3657468491"/>
+        <p14:creationId xmlns:p14="http://schemas.microsoft.com/office/powerpoint/2010/main" val="1861804746"/>
       </p:ext>
     </p:extLst>
   </p:cSld>
@@ -2034,7 +2034,7 @@
     </p:spTree>
     <p:extLst>
       <p:ext uri="{BB962C8B-B14F-4D97-AF65-F5344CB8AC3E}">
-        <p14:creationId xmlns:p14="http://schemas.microsoft.com/office/powerpoint/2010/main" val="3199436507"/>
+        <p14:creationId xmlns:p14="http://schemas.microsoft.com/office/powerpoint/2010/main" val="2526428932"/>
       </p:ext>
     </p:extLst>
   </p:cSld>
@@ -6455,7 +6455,7 @@
     </p:spTree>
     <p:extLst>
       <p:ext uri="{BB962C8B-B14F-4D97-AF65-F5344CB8AC3E}">
-        <p14:creationId xmlns:p14="http://schemas.microsoft.com/office/powerpoint/2010/main" val="1426530229"/>
+        <p14:creationId xmlns:p14="http://schemas.microsoft.com/office/powerpoint/2010/main" val="3051181411"/>
       </p:ext>
     </p:extLst>
   </p:cSld>
@@ -7098,7 +7098,7 @@
     </p:spTree>
     <p:extLst>
       <p:ext uri="{BB962C8B-B14F-4D97-AF65-F5344CB8AC3E}">
-        <p14:creationId xmlns:p14="http://schemas.microsoft.com/office/powerpoint/2010/main" val="3000251586"/>
+        <p14:creationId xmlns:p14="http://schemas.microsoft.com/office/powerpoint/2010/main" val="3741841817"/>
       </p:ext>
     </p:extLst>
   </p:cSld>
@@ -7708,7 +7708,7 @@
     </p:spTree>
     <p:extLst>
       <p:ext uri="{BB962C8B-B14F-4D97-AF65-F5344CB8AC3E}">
-        <p14:creationId xmlns:p14="http://schemas.microsoft.com/office/powerpoint/2010/main" val="745220150"/>
+        <p14:creationId xmlns:p14="http://schemas.microsoft.com/office/powerpoint/2010/main" val="401221118"/>
       </p:ext>
     </p:extLst>
   </p:cSld>
@@ -8794,7 +8794,7 @@
     </p:spTree>
     <p:extLst>
       <p:ext uri="{BB962C8B-B14F-4D97-AF65-F5344CB8AC3E}">
-        <p14:creationId xmlns:p14="http://schemas.microsoft.com/office/powerpoint/2010/main" val="1874168928"/>
+        <p14:creationId xmlns:p14="http://schemas.microsoft.com/office/powerpoint/2010/main" val="166816082"/>
       </p:ext>
     </p:extLst>
   </p:cSld>
@@ -14054,7 +14054,7 @@
     </p:spTree>
     <p:extLst>
       <p:ext uri="{BB962C8B-B14F-4D97-AF65-F5344CB8AC3E}">
-        <p14:creationId xmlns:p14="http://schemas.microsoft.com/office/powerpoint/2010/main" val="3323208633"/>
+        <p14:creationId xmlns:p14="http://schemas.microsoft.com/office/powerpoint/2010/main" val="70739510"/>
       </p:ext>
     </p:extLst>
   </p:cSld>
@@ -14323,7 +14323,7 @@
     </p:spTree>
     <p:extLst>
       <p:ext uri="{BB962C8B-B14F-4D97-AF65-F5344CB8AC3E}">
-        <p14:creationId xmlns:p14="http://schemas.microsoft.com/office/powerpoint/2010/main" val="1637269872"/>
+        <p14:creationId xmlns:p14="http://schemas.microsoft.com/office/powerpoint/2010/main" val="158469782"/>
       </p:ext>
     </p:extLst>
   </p:cSld>
@@ -14678,7 +14678,7 @@
     </p:spTree>
     <p:extLst>
       <p:ext uri="{BB962C8B-B14F-4D97-AF65-F5344CB8AC3E}">
-        <p14:creationId xmlns:p14="http://schemas.microsoft.com/office/powerpoint/2010/main" val="912293259"/>
+        <p14:creationId xmlns:p14="http://schemas.microsoft.com/office/powerpoint/2010/main" val="3035823222"/>
       </p:ext>
     </p:extLst>
   </p:cSld>
@@ -15033,7 +15033,7 @@
     </p:spTree>
     <p:extLst>
       <p:ext uri="{BB962C8B-B14F-4D97-AF65-F5344CB8AC3E}">
-        <p14:creationId xmlns:p14="http://schemas.microsoft.com/office/powerpoint/2010/main" val="2224551019"/>
+        <p14:creationId xmlns:p14="http://schemas.microsoft.com/office/powerpoint/2010/main" val="1137661903"/>
       </p:ext>
     </p:extLst>
   </p:cSld>
